--- a/slides/08-naive-bayes.pptx
+++ b/slides/08-naive-bayes.pptx
@@ -217,7 +217,7 @@
           <a:p>
             <a:fld id="{A5320152-7289-42ED-97D3-BBB411F9F8C0}" type="datetimeFigureOut">
               <a:rPr lang="en-US" smtClean="0"/>
-              <a:t>1/26/2026</a:t>
+              <a:t>2/3/2026</a:t>
             </a:fld>
             <a:endParaRPr lang="en-US"/>
           </a:p>
@@ -637,7 +637,7 @@
           <a:p>
             <a:fld id="{D1D1EADE-8E88-4C7C-8AC5-FB148DE4940E}" type="datetime1">
               <a:rPr lang="en-US" smtClean="0"/>
-              <a:t>1/26/2026</a:t>
+              <a:t>2/3/2026</a:t>
             </a:fld>
             <a:endParaRPr lang="en-US"/>
           </a:p>
@@ -837,7 +837,7 @@
           <a:p>
             <a:fld id="{EC3C8B9C-477D-492A-96AD-1FC2CC997A73}" type="datetime1">
               <a:rPr lang="en-US" smtClean="0"/>
-              <a:t>1/26/2026</a:t>
+              <a:t>2/3/2026</a:t>
             </a:fld>
             <a:endParaRPr lang="en-US"/>
           </a:p>
@@ -1047,7 +1047,7 @@
           <a:p>
             <a:fld id="{42D3AED5-E26D-4E29-B1B3-7847B6779594}" type="datetime1">
               <a:rPr lang="en-US" smtClean="0"/>
-              <a:t>1/26/2026</a:t>
+              <a:t>2/3/2026</a:t>
             </a:fld>
             <a:endParaRPr lang="en-US"/>
           </a:p>
@@ -1507,7 +1507,7 @@
           <a:p>
             <a:fld id="{157B6794-849E-4626-908B-D15793550EFB}" type="datetime1">
               <a:rPr lang="en-US" smtClean="0"/>
-              <a:t>1/26/2026</a:t>
+              <a:t>2/3/2026</a:t>
             </a:fld>
             <a:endParaRPr lang="en-US"/>
           </a:p>
@@ -1783,7 +1783,7 @@
           <a:p>
             <a:fld id="{63DB64E7-5594-42A3-ADBF-E95A7ACEAD64}" type="datetime1">
               <a:rPr lang="en-US" smtClean="0"/>
-              <a:t>1/26/2026</a:t>
+              <a:t>2/3/2026</a:t>
             </a:fld>
             <a:endParaRPr lang="en-US"/>
           </a:p>
@@ -2056,7 +2056,7 @@
           <a:p>
             <a:fld id="{18462B0B-D248-4FFB-8695-AD7FA4B1284A}" type="datetime1">
               <a:rPr lang="en-US" smtClean="0"/>
-              <a:t>1/26/2026</a:t>
+              <a:t>2/3/2026</a:t>
             </a:fld>
             <a:endParaRPr lang="en-US"/>
           </a:p>
@@ -2479,7 +2479,7 @@
           <a:p>
             <a:fld id="{D0378EFB-9159-4510-B73F-4F0409ADE937}" type="datetime1">
               <a:rPr lang="en-US" smtClean="0"/>
-              <a:t>1/26/2026</a:t>
+              <a:t>2/3/2026</a:t>
             </a:fld>
             <a:endParaRPr lang="en-US"/>
           </a:p>
@@ -2621,7 +2621,7 @@
           <a:p>
             <a:fld id="{89BC9412-2452-4BED-A324-9D8C115361AD}" type="datetime1">
               <a:rPr lang="en-US" smtClean="0"/>
-              <a:t>1/26/2026</a:t>
+              <a:t>2/3/2026</a:t>
             </a:fld>
             <a:endParaRPr lang="en-US"/>
           </a:p>
@@ -2734,7 +2734,7 @@
           <a:p>
             <a:fld id="{F5318F62-D251-40E8-A23C-F4CFE9FEAB41}" type="datetime1">
               <a:rPr lang="en-US" smtClean="0"/>
-              <a:t>1/26/2026</a:t>
+              <a:t>2/3/2026</a:t>
             </a:fld>
             <a:endParaRPr lang="en-US"/>
           </a:p>
@@ -3047,7 +3047,7 @@
           <a:p>
             <a:fld id="{44F76144-149E-4874-93A5-554A0357CF82}" type="datetime1">
               <a:rPr lang="en-US" smtClean="0"/>
-              <a:t>1/26/2026</a:t>
+              <a:t>2/3/2026</a:t>
             </a:fld>
             <a:endParaRPr lang="en-US"/>
           </a:p>
@@ -3340,7 +3340,7 @@
           <a:p>
             <a:fld id="{50BA65D8-0540-4835-AE5C-25D29DBA01BE}" type="datetime1">
               <a:rPr lang="en-US" smtClean="0"/>
-              <a:t>1/26/2026</a:t>
+              <a:t>2/3/2026</a:t>
             </a:fld>
             <a:endParaRPr lang="en-US"/>
           </a:p>
@@ -3582,7 +3582,7 @@
           <a:p>
             <a:fld id="{E31BA835-12AC-4E8F-955A-EA3F4DE2791F}" type="datetime1">
               <a:rPr lang="en-US" smtClean="0"/>
-              <a:t>1/26/2026</a:t>
+              <a:t>2/3/2026</a:t>
             </a:fld>
             <a:endParaRPr lang="en-US"/>
           </a:p>
@@ -5285,7 +5285,7 @@
             <a:effectLst/>
             <a:extLst>
               <a:ext uri="{C572A759-6A51-4108-AA02-DFA0A04FC94B}">
-                <ma14:wrappingTextBoxFlag xmlns:ma14="http://schemas.microsoft.com/office/mac/drawingml/2011/main" xmlns:a14="http://schemas.microsoft.com/office/drawing/2010/main" xmlns:m="http://schemas.openxmlformats.org/officeDocument/2006/math" xmlns="" val="1"/>
+                <ma14:wrappingTextBoxFlag xmlns="" xmlns:m="http://schemas.openxmlformats.org/officeDocument/2006/math" xmlns:a14="http://schemas.microsoft.com/office/drawing/2010/main" xmlns:ma14="http://schemas.microsoft.com/office/mac/drawingml/2011/main" val="1"/>
               </a:ext>
             </a:extLst>
           </p:spPr>
@@ -5334,7 +5334,7 @@
           </a:ln>
           <a:extLst>
             <a:ext uri="{C572A759-6A51-4108-AA02-DFA0A04FC94B}">
-              <ma14:wrappingTextBoxFlag xmlns:ma14="http://schemas.microsoft.com/office/mac/drawingml/2011/main" xmlns:a14="http://schemas.microsoft.com/office/drawing/2010/main" xmlns:m="http://schemas.openxmlformats.org/officeDocument/2006/math" xmlns="" val="1"/>
+              <ma14:wrappingTextBoxFlag xmlns="" xmlns:m="http://schemas.openxmlformats.org/officeDocument/2006/math" xmlns:a14="http://schemas.microsoft.com/office/drawing/2010/main" xmlns:ma14="http://schemas.microsoft.com/office/mac/drawingml/2011/main" val="1"/>
             </a:ext>
           </a:extLst>
         </p:spPr>
@@ -5378,7 +5378,7 @@
           </a:ln>
           <a:extLst>
             <a:ext uri="{C572A759-6A51-4108-AA02-DFA0A04FC94B}">
-              <ma14:wrappingTextBoxFlag xmlns:ma14="http://schemas.microsoft.com/office/mac/drawingml/2011/main" xmlns:a14="http://schemas.microsoft.com/office/drawing/2010/main" xmlns:m="http://schemas.openxmlformats.org/officeDocument/2006/math" xmlns="" val="1"/>
+              <ma14:wrappingTextBoxFlag xmlns="" xmlns:m="http://schemas.openxmlformats.org/officeDocument/2006/math" xmlns:a14="http://schemas.microsoft.com/office/drawing/2010/main" xmlns:ma14="http://schemas.microsoft.com/office/mac/drawingml/2011/main" val="1"/>
             </a:ext>
           </a:extLst>
         </p:spPr>
@@ -5422,7 +5422,7 @@
           </a:ln>
           <a:extLst>
             <a:ext uri="{C572A759-6A51-4108-AA02-DFA0A04FC94B}">
-              <ma14:wrappingTextBoxFlag xmlns:ma14="http://schemas.microsoft.com/office/mac/drawingml/2011/main" xmlns:a14="http://schemas.microsoft.com/office/drawing/2010/main" xmlns:m="http://schemas.openxmlformats.org/officeDocument/2006/math" xmlns="" val="1"/>
+              <ma14:wrappingTextBoxFlag xmlns="" xmlns:m="http://schemas.openxmlformats.org/officeDocument/2006/math" xmlns:a14="http://schemas.microsoft.com/office/drawing/2010/main" xmlns:ma14="http://schemas.microsoft.com/office/mac/drawingml/2011/main" val="1"/>
             </a:ext>
           </a:extLst>
         </p:spPr>
@@ -5466,7 +5466,7 @@
           </a:ln>
           <a:extLst>
             <a:ext uri="{C572A759-6A51-4108-AA02-DFA0A04FC94B}">
-              <ma14:wrappingTextBoxFlag xmlns:ma14="http://schemas.microsoft.com/office/mac/drawingml/2011/main" xmlns:a14="http://schemas.microsoft.com/office/drawing/2010/main" xmlns:m="http://schemas.openxmlformats.org/officeDocument/2006/math" xmlns="" val="1"/>
+              <ma14:wrappingTextBoxFlag xmlns="" xmlns:m="http://schemas.openxmlformats.org/officeDocument/2006/math" xmlns:a14="http://schemas.microsoft.com/office/drawing/2010/main" xmlns:ma14="http://schemas.microsoft.com/office/mac/drawingml/2011/main" val="1"/>
             </a:ext>
           </a:extLst>
         </p:spPr>
@@ -5510,7 +5510,7 @@
           </a:ln>
           <a:extLst>
             <a:ext uri="{C572A759-6A51-4108-AA02-DFA0A04FC94B}">
-              <ma14:wrappingTextBoxFlag xmlns:ma14="http://schemas.microsoft.com/office/mac/drawingml/2011/main" xmlns:a14="http://schemas.microsoft.com/office/drawing/2010/main" xmlns:m="http://schemas.openxmlformats.org/officeDocument/2006/math" xmlns="" val="1"/>
+              <ma14:wrappingTextBoxFlag xmlns="" xmlns:m="http://schemas.openxmlformats.org/officeDocument/2006/math" xmlns:a14="http://schemas.microsoft.com/office/drawing/2010/main" xmlns:ma14="http://schemas.microsoft.com/office/mac/drawingml/2011/main" val="1"/>
             </a:ext>
           </a:extLst>
         </p:spPr>
@@ -5578,7 +5578,7 @@
           </a:ln>
           <a:extLst>
             <a:ext uri="{C572A759-6A51-4108-AA02-DFA0A04FC94B}">
-              <ma14:wrappingTextBoxFlag xmlns:ma14="http://schemas.microsoft.com/office/mac/drawingml/2011/main" xmlns:a14="http://schemas.microsoft.com/office/drawing/2010/main" xmlns:m="http://schemas.openxmlformats.org/officeDocument/2006/math" xmlns="" val="1"/>
+              <ma14:wrappingTextBoxFlag xmlns="" xmlns:m="http://schemas.openxmlformats.org/officeDocument/2006/math" xmlns:a14="http://schemas.microsoft.com/office/drawing/2010/main" xmlns:ma14="http://schemas.microsoft.com/office/mac/drawingml/2011/main" val="1"/>
             </a:ext>
           </a:extLst>
         </p:spPr>
@@ -6085,7 +6085,7 @@
           </a:ln>
           <a:extLst>
             <a:ext uri="{C572A759-6A51-4108-AA02-DFA0A04FC94B}">
-              <ma14:wrappingTextBoxFlag xmlns:ma14="http://schemas.microsoft.com/office/mac/drawingml/2011/main" xmlns:a14="http://schemas.microsoft.com/office/drawing/2010/main" xmlns:m="http://schemas.openxmlformats.org/officeDocument/2006/math" xmlns="" val="1"/>
+              <ma14:wrappingTextBoxFlag xmlns="" xmlns:m="http://schemas.openxmlformats.org/officeDocument/2006/math" xmlns:a14="http://schemas.microsoft.com/office/drawing/2010/main" xmlns:ma14="http://schemas.microsoft.com/office/mac/drawingml/2011/main" val="1"/>
             </a:ext>
           </a:extLst>
         </p:spPr>
@@ -6129,7 +6129,7 @@
           </a:ln>
           <a:extLst>
             <a:ext uri="{C572A759-6A51-4108-AA02-DFA0A04FC94B}">
-              <ma14:wrappingTextBoxFlag xmlns:ma14="http://schemas.microsoft.com/office/mac/drawingml/2011/main" xmlns:a14="http://schemas.microsoft.com/office/drawing/2010/main" xmlns:m="http://schemas.openxmlformats.org/officeDocument/2006/math" xmlns="" val="1"/>
+              <ma14:wrappingTextBoxFlag xmlns="" xmlns:m="http://schemas.openxmlformats.org/officeDocument/2006/math" xmlns:a14="http://schemas.microsoft.com/office/drawing/2010/main" xmlns:ma14="http://schemas.microsoft.com/office/mac/drawingml/2011/main" val="1"/>
             </a:ext>
           </a:extLst>
         </p:spPr>
@@ -6237,7 +6237,7 @@
               </a:ln>
               <a:extLst>
                 <a:ext uri="{C572A759-6A51-4108-AA02-DFA0A04FC94B}">
-                  <ma14:wrappingTextBoxFlag xmlns:ma14="http://schemas.microsoft.com/office/mac/drawingml/2011/main" xmlns:m="http://schemas.openxmlformats.org/officeDocument/2006/math" xmlns="" val="1"/>
+                  <ma14:wrappingTextBoxFlag xmlns="" xmlns:m="http://schemas.openxmlformats.org/officeDocument/2006/math" xmlns:ma14="http://schemas.microsoft.com/office/mac/drawingml/2011/main" val="1"/>
                 </a:ext>
               </a:extLst>
             </p:spPr>
@@ -6851,7 +6851,7 @@
           </a:ln>
           <a:extLst>
             <a:ext uri="{C572A759-6A51-4108-AA02-DFA0A04FC94B}">
-              <ma14:wrappingTextBoxFlag xmlns:ma14="http://schemas.microsoft.com/office/mac/drawingml/2011/main" xmlns:a14="http://schemas.microsoft.com/office/drawing/2010/main" xmlns:m="http://schemas.openxmlformats.org/officeDocument/2006/math" xmlns="" val="1"/>
+              <ma14:wrappingTextBoxFlag xmlns="" xmlns:m="http://schemas.openxmlformats.org/officeDocument/2006/math" xmlns:a14="http://schemas.microsoft.com/office/drawing/2010/main" xmlns:ma14="http://schemas.microsoft.com/office/mac/drawingml/2011/main" val="1"/>
             </a:ext>
           </a:extLst>
         </p:spPr>
@@ -6895,7 +6895,7 @@
           </a:ln>
           <a:extLst>
             <a:ext uri="{C572A759-6A51-4108-AA02-DFA0A04FC94B}">
-              <ma14:wrappingTextBoxFlag xmlns:ma14="http://schemas.microsoft.com/office/mac/drawingml/2011/main" xmlns:a14="http://schemas.microsoft.com/office/drawing/2010/main" xmlns:m="http://schemas.openxmlformats.org/officeDocument/2006/math" xmlns="" val="1"/>
+              <ma14:wrappingTextBoxFlag xmlns="" xmlns:m="http://schemas.openxmlformats.org/officeDocument/2006/math" xmlns:a14="http://schemas.microsoft.com/office/drawing/2010/main" xmlns:ma14="http://schemas.microsoft.com/office/mac/drawingml/2011/main" val="1"/>
             </a:ext>
           </a:extLst>
         </p:spPr>
@@ -7003,7 +7003,7 @@
               </a:ln>
               <a:extLst>
                 <a:ext uri="{C572A759-6A51-4108-AA02-DFA0A04FC94B}">
-                  <ma14:wrappingTextBoxFlag xmlns:ma14="http://schemas.microsoft.com/office/mac/drawingml/2011/main" xmlns:m="http://schemas.openxmlformats.org/officeDocument/2006/math" xmlns="" val="1"/>
+                  <ma14:wrappingTextBoxFlag xmlns="" xmlns:m="http://schemas.openxmlformats.org/officeDocument/2006/math" xmlns:ma14="http://schemas.microsoft.com/office/mac/drawingml/2011/main" val="1"/>
                 </a:ext>
               </a:extLst>
             </p:spPr>
@@ -7767,7 +7767,7 @@
           </a:ln>
           <a:extLst>
             <a:ext uri="{C572A759-6A51-4108-AA02-DFA0A04FC94B}">
-              <ma14:wrappingTextBoxFlag xmlns:ma14="http://schemas.microsoft.com/office/mac/drawingml/2011/main" xmlns:a14="http://schemas.microsoft.com/office/drawing/2010/main" xmlns:m="http://schemas.openxmlformats.org/officeDocument/2006/math" xmlns="" val="1"/>
+              <ma14:wrappingTextBoxFlag xmlns="" xmlns:m="http://schemas.openxmlformats.org/officeDocument/2006/math" xmlns:a14="http://schemas.microsoft.com/office/drawing/2010/main" xmlns:ma14="http://schemas.microsoft.com/office/mac/drawingml/2011/main" val="1"/>
             </a:ext>
           </a:extLst>
         </p:spPr>
@@ -7811,7 +7811,7 @@
           </a:ln>
           <a:extLst>
             <a:ext uri="{C572A759-6A51-4108-AA02-DFA0A04FC94B}">
-              <ma14:wrappingTextBoxFlag xmlns:ma14="http://schemas.microsoft.com/office/mac/drawingml/2011/main" xmlns:a14="http://schemas.microsoft.com/office/drawing/2010/main" xmlns:m="http://schemas.openxmlformats.org/officeDocument/2006/math" xmlns="" val="1"/>
+              <ma14:wrappingTextBoxFlag xmlns="" xmlns:m="http://schemas.openxmlformats.org/officeDocument/2006/math" xmlns:a14="http://schemas.microsoft.com/office/drawing/2010/main" xmlns:ma14="http://schemas.microsoft.com/office/mac/drawingml/2011/main" val="1"/>
             </a:ext>
           </a:extLst>
         </p:spPr>
@@ -7898,8 +7898,8 @@
           </a:p>
         </p:txBody>
       </p:sp>
-      <mc:AlternateContent xmlns:mc="http://schemas.openxmlformats.org/markup-compatibility/2006" xmlns:a14="http://schemas.microsoft.com/office/drawing/2010/main">
-        <mc:Choice Requires="a14">
+      <mc:AlternateContent xmlns:mc="http://schemas.openxmlformats.org/markup-compatibility/2006">
+        <mc:Choice xmlns:a14="http://schemas.microsoft.com/office/drawing/2010/main" Requires="a14">
           <p:sp>
             <p:nvSpPr>
               <p:cNvPr id="268" name="Simplifying assumption #3 (actually, this is always required in modeling data):…"/>
@@ -7919,7 +7919,7 @@
               </a:ln>
               <a:extLst>
                 <a:ext uri="{C572A759-6A51-4108-AA02-DFA0A04FC94B}">
-                  <ma14:wrappingTextBoxFlag xmlns:ma14="http://schemas.microsoft.com/office/mac/drawingml/2011/main" xmlns:m="http://schemas.openxmlformats.org/officeDocument/2006/math" xmlns="" val="1"/>
+                  <ma14:wrappingTextBoxFlag xmlns="" xmlns:m="http://schemas.openxmlformats.org/officeDocument/2006/math" xmlns:ma14="http://schemas.microsoft.com/office/mac/drawingml/2011/main" val="1"/>
                 </a:ext>
               </a:extLst>
             </p:spPr>
@@ -7941,7 +7941,7 @@
                 </a:pPr>
                 <a:r>
                   <a:rPr sz="2000" dirty="0"/>
-                  <a:t>Simplifying assumption #3 (actually, this is always required in modeling data):</a:t>
+                  <a:t>Simplifying assumption #3:</a:t>
                 </a:r>
                 <a:br>
                   <a:rPr sz="2000" dirty="0"/>
@@ -8251,7 +8251,7 @@
             </p:txBody>
           </p:sp>
         </mc:Choice>
-        <mc:Fallback xmlns="">
+        <mc:Fallback>
           <p:sp>
             <p:nvSpPr>
               <p:cNvPr id="268" name="Simplifying assumption #3 (actually, this is always required in modeling data):…"/>
@@ -8279,7 +8279,7 @@
               </a:ln>
               <a:extLst>
                 <a:ext uri="{C572A759-6A51-4108-AA02-DFA0A04FC94B}">
-                  <ma14:wrappingTextBoxFlag xmlns:ma14="http://schemas.microsoft.com/office/mac/drawingml/2011/main" xmlns:a14="http://schemas.microsoft.com/office/drawing/2010/main" xmlns:m="http://schemas.openxmlformats.org/officeDocument/2006/math" xmlns="" val="1"/>
+                  <ma14:wrappingTextBoxFlag xmlns="" xmlns:m="http://schemas.openxmlformats.org/officeDocument/2006/math" xmlns:ma14="http://schemas.microsoft.com/office/mac/drawingml/2011/main" xmlns:a14="http://schemas.microsoft.com/office/drawing/2010/main" val="1"/>
                 </a:ext>
               </a:extLst>
             </p:spPr>
@@ -8664,7 +8664,7 @@
           </a:ln>
           <a:extLst>
             <a:ext uri="{C572A759-6A51-4108-AA02-DFA0A04FC94B}">
-              <ma14:wrappingTextBoxFlag xmlns:ma14="http://schemas.microsoft.com/office/mac/drawingml/2011/main" xmlns:a14="http://schemas.microsoft.com/office/drawing/2010/main" xmlns:m="http://schemas.openxmlformats.org/officeDocument/2006/math" xmlns="" val="1"/>
+              <ma14:wrappingTextBoxFlag xmlns="" xmlns:m="http://schemas.openxmlformats.org/officeDocument/2006/math" xmlns:a14="http://schemas.microsoft.com/office/drawing/2010/main" xmlns:ma14="http://schemas.microsoft.com/office/mac/drawingml/2011/main" val="1"/>
             </a:ext>
           </a:extLst>
         </p:spPr>
@@ -8708,7 +8708,7 @@
           </a:ln>
           <a:extLst>
             <a:ext uri="{C572A759-6A51-4108-AA02-DFA0A04FC94B}">
-              <ma14:wrappingTextBoxFlag xmlns:ma14="http://schemas.microsoft.com/office/mac/drawingml/2011/main" xmlns:a14="http://schemas.microsoft.com/office/drawing/2010/main" xmlns:m="http://schemas.openxmlformats.org/officeDocument/2006/math" xmlns="" val="1"/>
+              <ma14:wrappingTextBoxFlag xmlns="" xmlns:m="http://schemas.openxmlformats.org/officeDocument/2006/math" xmlns:a14="http://schemas.microsoft.com/office/drawing/2010/main" xmlns:ma14="http://schemas.microsoft.com/office/mac/drawingml/2011/main" val="1"/>
             </a:ext>
           </a:extLst>
         </p:spPr>
@@ -9259,7 +9259,7 @@
           </a:ln>
           <a:extLst>
             <a:ext uri="{C572A759-6A51-4108-AA02-DFA0A04FC94B}">
-              <ma14:wrappingTextBoxFlag xmlns:ma14="http://schemas.microsoft.com/office/mac/drawingml/2011/main" xmlns:a14="http://schemas.microsoft.com/office/drawing/2010/main" xmlns:m="http://schemas.openxmlformats.org/officeDocument/2006/math" xmlns="" val="1"/>
+              <ma14:wrappingTextBoxFlag xmlns="" xmlns:m="http://schemas.openxmlformats.org/officeDocument/2006/math" xmlns:a14="http://schemas.microsoft.com/office/drawing/2010/main" xmlns:ma14="http://schemas.microsoft.com/office/mac/drawingml/2011/main" val="1"/>
             </a:ext>
           </a:extLst>
         </p:spPr>
@@ -9303,7 +9303,7 @@
           </a:ln>
           <a:extLst>
             <a:ext uri="{C572A759-6A51-4108-AA02-DFA0A04FC94B}">
-              <ma14:wrappingTextBoxFlag xmlns:ma14="http://schemas.microsoft.com/office/mac/drawingml/2011/main" xmlns:a14="http://schemas.microsoft.com/office/drawing/2010/main" xmlns:m="http://schemas.openxmlformats.org/officeDocument/2006/math" xmlns="" val="1"/>
+              <ma14:wrappingTextBoxFlag xmlns="" xmlns:m="http://schemas.openxmlformats.org/officeDocument/2006/math" xmlns:a14="http://schemas.microsoft.com/office/drawing/2010/main" xmlns:ma14="http://schemas.microsoft.com/office/mac/drawingml/2011/main" val="1"/>
             </a:ext>
           </a:extLst>
         </p:spPr>
@@ -9378,7 +9378,7 @@
           </a:ln>
           <a:extLst>
             <a:ext uri="{C572A759-6A51-4108-AA02-DFA0A04FC94B}">
-              <ma14:wrappingTextBoxFlag xmlns:ma14="http://schemas.microsoft.com/office/mac/drawingml/2011/main" xmlns:a14="http://schemas.microsoft.com/office/drawing/2010/main" xmlns:m="http://schemas.openxmlformats.org/officeDocument/2006/math" xmlns="" val="1"/>
+              <ma14:wrappingTextBoxFlag xmlns="" xmlns:m="http://schemas.openxmlformats.org/officeDocument/2006/math" xmlns:a14="http://schemas.microsoft.com/office/drawing/2010/main" xmlns:ma14="http://schemas.microsoft.com/office/mac/drawingml/2011/main" val="1"/>
             </a:ext>
           </a:extLst>
         </p:spPr>
@@ -9769,7 +9769,7 @@
           </a:prstGeom>
           <a:extLst>
             <a:ext uri="{C572A759-6A51-4108-AA02-DFA0A04FC94B}">
-              <ma14:wrappingTextBoxFlag xmlns:ma14="http://schemas.microsoft.com/office/mac/drawingml/2011/main" xmlns:a14="http://schemas.microsoft.com/office/drawing/2010/main" xmlns:m="http://schemas.openxmlformats.org/officeDocument/2006/math" xmlns="" val="1"/>
+              <ma14:wrappingTextBoxFlag xmlns="" xmlns:m="http://schemas.openxmlformats.org/officeDocument/2006/math" xmlns:a14="http://schemas.microsoft.com/office/drawing/2010/main" xmlns:ma14="http://schemas.microsoft.com/office/mac/drawingml/2011/main" val="1"/>
             </a:ext>
           </a:extLst>
         </p:spPr>
@@ -10375,7 +10375,7 @@
           </a:ln>
           <a:extLst>
             <a:ext uri="{C572A759-6A51-4108-AA02-DFA0A04FC94B}">
-              <ma14:wrappingTextBoxFlag xmlns:ma14="http://schemas.microsoft.com/office/mac/drawingml/2011/main" xmlns:a14="http://schemas.microsoft.com/office/drawing/2010/main" xmlns:m="http://schemas.openxmlformats.org/officeDocument/2006/math" xmlns="" val="1"/>
+              <ma14:wrappingTextBoxFlag xmlns="" xmlns:m="http://schemas.openxmlformats.org/officeDocument/2006/math" xmlns:a14="http://schemas.microsoft.com/office/drawing/2010/main" xmlns:ma14="http://schemas.microsoft.com/office/mac/drawingml/2011/main" val="1"/>
             </a:ext>
           </a:extLst>
         </p:spPr>
@@ -11234,7 +11234,7 @@
               </a:ln>
               <a:extLst>
                 <a:ext uri="{C572A759-6A51-4108-AA02-DFA0A04FC94B}">
-                  <ma14:wrappingTextBoxFlag xmlns:ma14="http://schemas.microsoft.com/office/mac/drawingml/2011/main" xmlns:m="http://schemas.openxmlformats.org/officeDocument/2006/math" xmlns="" val="1"/>
+                  <ma14:wrappingTextBoxFlag xmlns="" xmlns:m="http://schemas.openxmlformats.org/officeDocument/2006/math" xmlns:ma14="http://schemas.microsoft.com/office/mac/drawingml/2011/main" val="1"/>
                 </a:ext>
               </a:extLst>
             </p:spPr>
@@ -11431,7 +11431,7 @@
                   <a:srgbClr val="009193"/>
                 </a:solidFill>
               </a:rPr>
-              <a:t>For Example:</a:t>
+              <a:t>Example:</a:t>
             </a:r>
             <a:endParaRPr i="1" dirty="0">
               <a:solidFill>
@@ -11491,7 +11491,7 @@
               </a:ln>
               <a:extLst>
                 <a:ext uri="{C572A759-6A51-4108-AA02-DFA0A04FC94B}">
-                  <ma14:wrappingTextBoxFlag xmlns:ma14="http://schemas.microsoft.com/office/mac/drawingml/2011/main" xmlns:m="http://schemas.openxmlformats.org/officeDocument/2006/math" xmlns="" val="1"/>
+                  <ma14:wrappingTextBoxFlag xmlns="" xmlns:m="http://schemas.openxmlformats.org/officeDocument/2006/math" xmlns:ma14="http://schemas.microsoft.com/office/mac/drawingml/2011/main" val="1"/>
                 </a:ext>
               </a:extLst>
             </p:spPr>
@@ -11709,7 +11709,7 @@
           </a:prstGeom>
           <a:extLst>
             <a:ext uri="{C572A759-6A51-4108-AA02-DFA0A04FC94B}">
-              <ma14:wrappingTextBoxFlag xmlns:ma14="http://schemas.microsoft.com/office/mac/drawingml/2011/main" xmlns:a14="http://schemas.microsoft.com/office/drawing/2010/main" xmlns:m="http://schemas.openxmlformats.org/officeDocument/2006/math" xmlns="" val="1"/>
+              <ma14:wrappingTextBoxFlag xmlns="" xmlns:m="http://schemas.openxmlformats.org/officeDocument/2006/math" xmlns:a14="http://schemas.microsoft.com/office/drawing/2010/main" xmlns:ma14="http://schemas.microsoft.com/office/mac/drawingml/2011/main" val="1"/>
             </a:ext>
           </a:extLst>
         </p:spPr>

--- a/slides/08-naive-bayes.pptx
+++ b/slides/08-naive-bayes.pptx
@@ -217,7 +217,7 @@
           <a:p>
             <a:fld id="{A5320152-7289-42ED-97D3-BBB411F9F8C0}" type="datetimeFigureOut">
               <a:rPr lang="en-US" smtClean="0"/>
-              <a:t>2/3/2026</a:t>
+              <a:t>2/23/2026</a:t>
             </a:fld>
             <a:endParaRPr lang="en-US"/>
           </a:p>
@@ -637,7 +637,7 @@
           <a:p>
             <a:fld id="{D1D1EADE-8E88-4C7C-8AC5-FB148DE4940E}" type="datetime1">
               <a:rPr lang="en-US" smtClean="0"/>
-              <a:t>2/3/2026</a:t>
+              <a:t>2/23/2026</a:t>
             </a:fld>
             <a:endParaRPr lang="en-US"/>
           </a:p>
@@ -837,7 +837,7 @@
           <a:p>
             <a:fld id="{EC3C8B9C-477D-492A-96AD-1FC2CC997A73}" type="datetime1">
               <a:rPr lang="en-US" smtClean="0"/>
-              <a:t>2/3/2026</a:t>
+              <a:t>2/23/2026</a:t>
             </a:fld>
             <a:endParaRPr lang="en-US"/>
           </a:p>
@@ -1047,7 +1047,7 @@
           <a:p>
             <a:fld id="{42D3AED5-E26D-4E29-B1B3-7847B6779594}" type="datetime1">
               <a:rPr lang="en-US" smtClean="0"/>
-              <a:t>2/3/2026</a:t>
+              <a:t>2/23/2026</a:t>
             </a:fld>
             <a:endParaRPr lang="en-US"/>
           </a:p>
@@ -1507,7 +1507,7 @@
           <a:p>
             <a:fld id="{157B6794-849E-4626-908B-D15793550EFB}" type="datetime1">
               <a:rPr lang="en-US" smtClean="0"/>
-              <a:t>2/3/2026</a:t>
+              <a:t>2/23/2026</a:t>
             </a:fld>
             <a:endParaRPr lang="en-US"/>
           </a:p>
@@ -1783,7 +1783,7 @@
           <a:p>
             <a:fld id="{63DB64E7-5594-42A3-ADBF-E95A7ACEAD64}" type="datetime1">
               <a:rPr lang="en-US" smtClean="0"/>
-              <a:t>2/3/2026</a:t>
+              <a:t>2/23/2026</a:t>
             </a:fld>
             <a:endParaRPr lang="en-US"/>
           </a:p>
@@ -2056,7 +2056,7 @@
           <a:p>
             <a:fld id="{18462B0B-D248-4FFB-8695-AD7FA4B1284A}" type="datetime1">
               <a:rPr lang="en-US" smtClean="0"/>
-              <a:t>2/3/2026</a:t>
+              <a:t>2/23/2026</a:t>
             </a:fld>
             <a:endParaRPr lang="en-US"/>
           </a:p>
@@ -2479,7 +2479,7 @@
           <a:p>
             <a:fld id="{D0378EFB-9159-4510-B73F-4F0409ADE937}" type="datetime1">
               <a:rPr lang="en-US" smtClean="0"/>
-              <a:t>2/3/2026</a:t>
+              <a:t>2/23/2026</a:t>
             </a:fld>
             <a:endParaRPr lang="en-US"/>
           </a:p>
@@ -2621,7 +2621,7 @@
           <a:p>
             <a:fld id="{89BC9412-2452-4BED-A324-9D8C115361AD}" type="datetime1">
               <a:rPr lang="en-US" smtClean="0"/>
-              <a:t>2/3/2026</a:t>
+              <a:t>2/23/2026</a:t>
             </a:fld>
             <a:endParaRPr lang="en-US"/>
           </a:p>
@@ -2734,7 +2734,7 @@
           <a:p>
             <a:fld id="{F5318F62-D251-40E8-A23C-F4CFE9FEAB41}" type="datetime1">
               <a:rPr lang="en-US" smtClean="0"/>
-              <a:t>2/3/2026</a:t>
+              <a:t>2/23/2026</a:t>
             </a:fld>
             <a:endParaRPr lang="en-US"/>
           </a:p>
@@ -3047,7 +3047,7 @@
           <a:p>
             <a:fld id="{44F76144-149E-4874-93A5-554A0357CF82}" type="datetime1">
               <a:rPr lang="en-US" smtClean="0"/>
-              <a:t>2/3/2026</a:t>
+              <a:t>2/23/2026</a:t>
             </a:fld>
             <a:endParaRPr lang="en-US"/>
           </a:p>
@@ -3340,7 +3340,7 @@
           <a:p>
             <a:fld id="{50BA65D8-0540-4835-AE5C-25D29DBA01BE}" type="datetime1">
               <a:rPr lang="en-US" smtClean="0"/>
-              <a:t>2/3/2026</a:t>
+              <a:t>2/23/2026</a:t>
             </a:fld>
             <a:endParaRPr lang="en-US"/>
           </a:p>
@@ -3582,7 +3582,7 @@
           <a:p>
             <a:fld id="{E31BA835-12AC-4E8F-955A-EA3F4DE2791F}" type="datetime1">
               <a:rPr lang="en-US" smtClean="0"/>
-              <a:t>2/3/2026</a:t>
+              <a:t>2/23/2026</a:t>
             </a:fld>
             <a:endParaRPr lang="en-US"/>
           </a:p>
@@ -5285,7 +5285,7 @@
             <a:effectLst/>
             <a:extLst>
               <a:ext uri="{C572A759-6A51-4108-AA02-DFA0A04FC94B}">
-                <ma14:wrappingTextBoxFlag xmlns="" xmlns:m="http://schemas.openxmlformats.org/officeDocument/2006/math" xmlns:a14="http://schemas.microsoft.com/office/drawing/2010/main" xmlns:ma14="http://schemas.microsoft.com/office/mac/drawingml/2011/main" val="1"/>
+                <ma14:wrappingTextBoxFlag xmlns:ma14="http://schemas.microsoft.com/office/mac/drawingml/2011/main" xmlns:a14="http://schemas.microsoft.com/office/drawing/2010/main" xmlns:m="http://schemas.openxmlformats.org/officeDocument/2006/math" xmlns="" val="1"/>
               </a:ext>
             </a:extLst>
           </p:spPr>
@@ -5334,7 +5334,7 @@
           </a:ln>
           <a:extLst>
             <a:ext uri="{C572A759-6A51-4108-AA02-DFA0A04FC94B}">
-              <ma14:wrappingTextBoxFlag xmlns="" xmlns:m="http://schemas.openxmlformats.org/officeDocument/2006/math" xmlns:a14="http://schemas.microsoft.com/office/drawing/2010/main" xmlns:ma14="http://schemas.microsoft.com/office/mac/drawingml/2011/main" val="1"/>
+              <ma14:wrappingTextBoxFlag xmlns:ma14="http://schemas.microsoft.com/office/mac/drawingml/2011/main" xmlns:a14="http://schemas.microsoft.com/office/drawing/2010/main" xmlns:m="http://schemas.openxmlformats.org/officeDocument/2006/math" xmlns="" val="1"/>
             </a:ext>
           </a:extLst>
         </p:spPr>
@@ -5378,7 +5378,7 @@
           </a:ln>
           <a:extLst>
             <a:ext uri="{C572A759-6A51-4108-AA02-DFA0A04FC94B}">
-              <ma14:wrappingTextBoxFlag xmlns="" xmlns:m="http://schemas.openxmlformats.org/officeDocument/2006/math" xmlns:a14="http://schemas.microsoft.com/office/drawing/2010/main" xmlns:ma14="http://schemas.microsoft.com/office/mac/drawingml/2011/main" val="1"/>
+              <ma14:wrappingTextBoxFlag xmlns:ma14="http://schemas.microsoft.com/office/mac/drawingml/2011/main" xmlns:a14="http://schemas.microsoft.com/office/drawing/2010/main" xmlns:m="http://schemas.openxmlformats.org/officeDocument/2006/math" xmlns="" val="1"/>
             </a:ext>
           </a:extLst>
         </p:spPr>
@@ -5422,7 +5422,7 @@
           </a:ln>
           <a:extLst>
             <a:ext uri="{C572A759-6A51-4108-AA02-DFA0A04FC94B}">
-              <ma14:wrappingTextBoxFlag xmlns="" xmlns:m="http://schemas.openxmlformats.org/officeDocument/2006/math" xmlns:a14="http://schemas.microsoft.com/office/drawing/2010/main" xmlns:ma14="http://schemas.microsoft.com/office/mac/drawingml/2011/main" val="1"/>
+              <ma14:wrappingTextBoxFlag xmlns:ma14="http://schemas.microsoft.com/office/mac/drawingml/2011/main" xmlns:a14="http://schemas.microsoft.com/office/drawing/2010/main" xmlns:m="http://schemas.openxmlformats.org/officeDocument/2006/math" xmlns="" val="1"/>
             </a:ext>
           </a:extLst>
         </p:spPr>
@@ -5466,7 +5466,7 @@
           </a:ln>
           <a:extLst>
             <a:ext uri="{C572A759-6A51-4108-AA02-DFA0A04FC94B}">
-              <ma14:wrappingTextBoxFlag xmlns="" xmlns:m="http://schemas.openxmlformats.org/officeDocument/2006/math" xmlns:a14="http://schemas.microsoft.com/office/drawing/2010/main" xmlns:ma14="http://schemas.microsoft.com/office/mac/drawingml/2011/main" val="1"/>
+              <ma14:wrappingTextBoxFlag xmlns:ma14="http://schemas.microsoft.com/office/mac/drawingml/2011/main" xmlns:a14="http://schemas.microsoft.com/office/drawing/2010/main" xmlns:m="http://schemas.openxmlformats.org/officeDocument/2006/math" xmlns="" val="1"/>
             </a:ext>
           </a:extLst>
         </p:spPr>
@@ -5510,7 +5510,7 @@
           </a:ln>
           <a:extLst>
             <a:ext uri="{C572A759-6A51-4108-AA02-DFA0A04FC94B}">
-              <ma14:wrappingTextBoxFlag xmlns="" xmlns:m="http://schemas.openxmlformats.org/officeDocument/2006/math" xmlns:a14="http://schemas.microsoft.com/office/drawing/2010/main" xmlns:ma14="http://schemas.microsoft.com/office/mac/drawingml/2011/main" val="1"/>
+              <ma14:wrappingTextBoxFlag xmlns:ma14="http://schemas.microsoft.com/office/mac/drawingml/2011/main" xmlns:a14="http://schemas.microsoft.com/office/drawing/2010/main" xmlns:m="http://schemas.openxmlformats.org/officeDocument/2006/math" xmlns="" val="1"/>
             </a:ext>
           </a:extLst>
         </p:spPr>
@@ -5578,7 +5578,7 @@
           </a:ln>
           <a:extLst>
             <a:ext uri="{C572A759-6A51-4108-AA02-DFA0A04FC94B}">
-              <ma14:wrappingTextBoxFlag xmlns="" xmlns:m="http://schemas.openxmlformats.org/officeDocument/2006/math" xmlns:a14="http://schemas.microsoft.com/office/drawing/2010/main" xmlns:ma14="http://schemas.microsoft.com/office/mac/drawingml/2011/main" val="1"/>
+              <ma14:wrappingTextBoxFlag xmlns:ma14="http://schemas.microsoft.com/office/mac/drawingml/2011/main" xmlns:a14="http://schemas.microsoft.com/office/drawing/2010/main" xmlns:m="http://schemas.openxmlformats.org/officeDocument/2006/math" xmlns="" val="1"/>
             </a:ext>
           </a:extLst>
         </p:spPr>
@@ -6085,7 +6085,7 @@
           </a:ln>
           <a:extLst>
             <a:ext uri="{C572A759-6A51-4108-AA02-DFA0A04FC94B}">
-              <ma14:wrappingTextBoxFlag xmlns="" xmlns:m="http://schemas.openxmlformats.org/officeDocument/2006/math" xmlns:a14="http://schemas.microsoft.com/office/drawing/2010/main" xmlns:ma14="http://schemas.microsoft.com/office/mac/drawingml/2011/main" val="1"/>
+              <ma14:wrappingTextBoxFlag xmlns:ma14="http://schemas.microsoft.com/office/mac/drawingml/2011/main" xmlns:a14="http://schemas.microsoft.com/office/drawing/2010/main" xmlns:m="http://schemas.openxmlformats.org/officeDocument/2006/math" xmlns="" val="1"/>
             </a:ext>
           </a:extLst>
         </p:spPr>
@@ -6129,7 +6129,7 @@
           </a:ln>
           <a:extLst>
             <a:ext uri="{C572A759-6A51-4108-AA02-DFA0A04FC94B}">
-              <ma14:wrappingTextBoxFlag xmlns="" xmlns:m="http://schemas.openxmlformats.org/officeDocument/2006/math" xmlns:a14="http://schemas.microsoft.com/office/drawing/2010/main" xmlns:ma14="http://schemas.microsoft.com/office/mac/drawingml/2011/main" val="1"/>
+              <ma14:wrappingTextBoxFlag xmlns:ma14="http://schemas.microsoft.com/office/mac/drawingml/2011/main" xmlns:a14="http://schemas.microsoft.com/office/drawing/2010/main" xmlns:m="http://schemas.openxmlformats.org/officeDocument/2006/math" xmlns="" val="1"/>
             </a:ext>
           </a:extLst>
         </p:spPr>
@@ -6216,8 +6216,8 @@
           </a:p>
         </p:txBody>
       </p:sp>
-      <mc:AlternateContent xmlns:mc="http://schemas.openxmlformats.org/markup-compatibility/2006" xmlns:a14="http://schemas.microsoft.com/office/drawing/2010/main">
-        <mc:Choice Requires="a14">
+      <mc:AlternateContent xmlns:mc="http://schemas.openxmlformats.org/markup-compatibility/2006">
+        <mc:Choice xmlns:a14="http://schemas.microsoft.com/office/drawing/2010/main" Requires="a14">
           <p:sp>
             <p:nvSpPr>
               <p:cNvPr id="243" name="Simplifying assumption #1:…"/>
@@ -6226,8 +6226,8 @@
             </p:nvSpPr>
             <p:spPr>
               <a:xfrm>
-                <a:off x="1745183" y="3645554"/>
-                <a:ext cx="8295663" cy="1791004"/>
+                <a:off x="1745183" y="3476277"/>
+                <a:ext cx="8295663" cy="2129558"/>
               </a:xfrm>
               <a:prstGeom prst="rect">
                 <a:avLst/>
@@ -6237,7 +6237,7 @@
               </a:ln>
               <a:extLst>
                 <a:ext uri="{C572A759-6A51-4108-AA02-DFA0A04FC94B}">
-                  <ma14:wrappingTextBoxFlag xmlns="" xmlns:m="http://schemas.openxmlformats.org/officeDocument/2006/math" xmlns:ma14="http://schemas.microsoft.com/office/mac/drawingml/2011/main" val="1"/>
+                  <ma14:wrappingTextBoxFlag xmlns:ma14="http://schemas.microsoft.com/office/mac/drawingml/2011/main" xmlns:m="http://schemas.openxmlformats.org/officeDocument/2006/math" xmlns="" val="1"/>
                 </a:ext>
               </a:extLst>
             </p:spPr>
@@ -6432,13 +6432,26 @@
                 </a14:m>
                 <a:r>
                   <a:rPr sz="2200" dirty="0"/>
-                  <a:t> are mutually independent </a:t>
+                  <a:t> are mutually independent</a:t>
                 </a:r>
+                <a:r>
+                  <a:rPr lang="en-US" sz="2200" dirty="0"/>
+                  <a:t> </a:t>
+                </a:r>
+                <a:r>
+                  <a:rPr lang="en-US" sz="2200"/>
+                  <a:t>(conditional on y)</a:t>
+                </a:r>
+                <a:r>
+                  <a:rPr sz="2200"/>
+                  <a:t> </a:t>
+                </a:r>
+                <a:endParaRPr sz="2200" dirty="0"/>
               </a:p>
             </p:txBody>
           </p:sp>
         </mc:Choice>
-        <mc:Fallback xmlns="">
+        <mc:Fallback>
           <p:sp>
             <p:nvSpPr>
               <p:cNvPr id="243" name="Simplifying assumption #1:…"/>
@@ -6449,8 +6462,8 @@
             </p:nvSpPr>
             <p:spPr>
               <a:xfrm>
-                <a:off x="1745183" y="3645554"/>
-                <a:ext cx="8295663" cy="1791004"/>
+                <a:off x="1745183" y="3476277"/>
+                <a:ext cx="8295663" cy="2129558"/>
               </a:xfrm>
               <a:prstGeom prst="rect">
                 <a:avLst/>
@@ -6458,7 +6471,7 @@
               <a:blipFill>
                 <a:blip r:embed="rId2"/>
                 <a:stretch>
-                  <a:fillRect l="-1616" t="-2381" b="-5442"/>
+                  <a:fillRect l="-1616" t="-1714" b="-5714"/>
                 </a:stretch>
               </a:blipFill>
               <a:ln w="3175">
@@ -6466,7 +6479,7 @@
               </a:ln>
               <a:extLst>
                 <a:ext uri="{C572A759-6A51-4108-AA02-DFA0A04FC94B}">
-                  <ma14:wrappingTextBoxFlag xmlns:ma14="http://schemas.microsoft.com/office/mac/drawingml/2011/main" xmlns:a14="http://schemas.microsoft.com/office/drawing/2010/main" xmlns:m="http://schemas.openxmlformats.org/officeDocument/2006/math" xmlns="" val="1"/>
+                  <ma14:wrappingTextBoxFlag xmlns:ma14="http://schemas.microsoft.com/office/mac/drawingml/2011/main" xmlns:m="http://schemas.openxmlformats.org/officeDocument/2006/math" xmlns="" xmlns:a14="http://schemas.microsoft.com/office/drawing/2010/main" val="1"/>
                 </a:ext>
               </a:extLst>
             </p:spPr>
@@ -6851,7 +6864,7 @@
           </a:ln>
           <a:extLst>
             <a:ext uri="{C572A759-6A51-4108-AA02-DFA0A04FC94B}">
-              <ma14:wrappingTextBoxFlag xmlns="" xmlns:m="http://schemas.openxmlformats.org/officeDocument/2006/math" xmlns:a14="http://schemas.microsoft.com/office/drawing/2010/main" xmlns:ma14="http://schemas.microsoft.com/office/mac/drawingml/2011/main" val="1"/>
+              <ma14:wrappingTextBoxFlag xmlns:ma14="http://schemas.microsoft.com/office/mac/drawingml/2011/main" xmlns:a14="http://schemas.microsoft.com/office/drawing/2010/main" xmlns:m="http://schemas.openxmlformats.org/officeDocument/2006/math" xmlns="" val="1"/>
             </a:ext>
           </a:extLst>
         </p:spPr>
@@ -6895,7 +6908,7 @@
           </a:ln>
           <a:extLst>
             <a:ext uri="{C572A759-6A51-4108-AA02-DFA0A04FC94B}">
-              <ma14:wrappingTextBoxFlag xmlns="" xmlns:m="http://schemas.openxmlformats.org/officeDocument/2006/math" xmlns:a14="http://schemas.microsoft.com/office/drawing/2010/main" xmlns:ma14="http://schemas.microsoft.com/office/mac/drawingml/2011/main" val="1"/>
+              <ma14:wrappingTextBoxFlag xmlns:ma14="http://schemas.microsoft.com/office/mac/drawingml/2011/main" xmlns:a14="http://schemas.microsoft.com/office/drawing/2010/main" xmlns:m="http://schemas.openxmlformats.org/officeDocument/2006/math" xmlns="" val="1"/>
             </a:ext>
           </a:extLst>
         </p:spPr>
@@ -7003,7 +7016,7 @@
               </a:ln>
               <a:extLst>
                 <a:ext uri="{C572A759-6A51-4108-AA02-DFA0A04FC94B}">
-                  <ma14:wrappingTextBoxFlag xmlns="" xmlns:m="http://schemas.openxmlformats.org/officeDocument/2006/math" xmlns:ma14="http://schemas.microsoft.com/office/mac/drawingml/2011/main" val="1"/>
+                  <ma14:wrappingTextBoxFlag xmlns:ma14="http://schemas.microsoft.com/office/mac/drawingml/2011/main" xmlns:m="http://schemas.openxmlformats.org/officeDocument/2006/math" xmlns="" val="1"/>
                 </a:ext>
               </a:extLst>
             </p:spPr>
@@ -7767,7 +7780,7 @@
           </a:ln>
           <a:extLst>
             <a:ext uri="{C572A759-6A51-4108-AA02-DFA0A04FC94B}">
-              <ma14:wrappingTextBoxFlag xmlns="" xmlns:m="http://schemas.openxmlformats.org/officeDocument/2006/math" xmlns:a14="http://schemas.microsoft.com/office/drawing/2010/main" xmlns:ma14="http://schemas.microsoft.com/office/mac/drawingml/2011/main" val="1"/>
+              <ma14:wrappingTextBoxFlag xmlns:ma14="http://schemas.microsoft.com/office/mac/drawingml/2011/main" xmlns:a14="http://schemas.microsoft.com/office/drawing/2010/main" xmlns:m="http://schemas.openxmlformats.org/officeDocument/2006/math" xmlns="" val="1"/>
             </a:ext>
           </a:extLst>
         </p:spPr>
@@ -7811,7 +7824,7 @@
           </a:ln>
           <a:extLst>
             <a:ext uri="{C572A759-6A51-4108-AA02-DFA0A04FC94B}">
-              <ma14:wrappingTextBoxFlag xmlns="" xmlns:m="http://schemas.openxmlformats.org/officeDocument/2006/math" xmlns:a14="http://schemas.microsoft.com/office/drawing/2010/main" xmlns:ma14="http://schemas.microsoft.com/office/mac/drawingml/2011/main" val="1"/>
+              <ma14:wrappingTextBoxFlag xmlns:ma14="http://schemas.microsoft.com/office/mac/drawingml/2011/main" xmlns:a14="http://schemas.microsoft.com/office/drawing/2010/main" xmlns:m="http://schemas.openxmlformats.org/officeDocument/2006/math" xmlns="" val="1"/>
             </a:ext>
           </a:extLst>
         </p:spPr>
@@ -7898,8 +7911,8 @@
           </a:p>
         </p:txBody>
       </p:sp>
-      <mc:AlternateContent xmlns:mc="http://schemas.openxmlformats.org/markup-compatibility/2006">
-        <mc:Choice xmlns:a14="http://schemas.microsoft.com/office/drawing/2010/main" Requires="a14">
+      <mc:AlternateContent xmlns:mc="http://schemas.openxmlformats.org/markup-compatibility/2006" xmlns:a14="http://schemas.microsoft.com/office/drawing/2010/main">
+        <mc:Choice Requires="a14">
           <p:sp>
             <p:nvSpPr>
               <p:cNvPr id="268" name="Simplifying assumption #3 (actually, this is always required in modeling data):…"/>
@@ -7919,7 +7932,7 @@
               </a:ln>
               <a:extLst>
                 <a:ext uri="{C572A759-6A51-4108-AA02-DFA0A04FC94B}">
-                  <ma14:wrappingTextBoxFlag xmlns="" xmlns:m="http://schemas.openxmlformats.org/officeDocument/2006/math" xmlns:ma14="http://schemas.microsoft.com/office/mac/drawingml/2011/main" val="1"/>
+                  <ma14:wrappingTextBoxFlag xmlns:ma14="http://schemas.microsoft.com/office/mac/drawingml/2011/main" xmlns:m="http://schemas.openxmlformats.org/officeDocument/2006/math" xmlns="" val="1"/>
                 </a:ext>
               </a:extLst>
             </p:spPr>
@@ -8251,7 +8264,7 @@
             </p:txBody>
           </p:sp>
         </mc:Choice>
-        <mc:Fallback>
+        <mc:Fallback xmlns="">
           <p:sp>
             <p:nvSpPr>
               <p:cNvPr id="268" name="Simplifying assumption #3 (actually, this is always required in modeling data):…"/>
@@ -8664,7 +8677,7 @@
           </a:ln>
           <a:extLst>
             <a:ext uri="{C572A759-6A51-4108-AA02-DFA0A04FC94B}">
-              <ma14:wrappingTextBoxFlag xmlns="" xmlns:m="http://schemas.openxmlformats.org/officeDocument/2006/math" xmlns:a14="http://schemas.microsoft.com/office/drawing/2010/main" xmlns:ma14="http://schemas.microsoft.com/office/mac/drawingml/2011/main" val="1"/>
+              <ma14:wrappingTextBoxFlag xmlns:ma14="http://schemas.microsoft.com/office/mac/drawingml/2011/main" xmlns:a14="http://schemas.microsoft.com/office/drawing/2010/main" xmlns:m="http://schemas.openxmlformats.org/officeDocument/2006/math" xmlns="" val="1"/>
             </a:ext>
           </a:extLst>
         </p:spPr>
@@ -8708,7 +8721,7 @@
           </a:ln>
           <a:extLst>
             <a:ext uri="{C572A759-6A51-4108-AA02-DFA0A04FC94B}">
-              <ma14:wrappingTextBoxFlag xmlns="" xmlns:m="http://schemas.openxmlformats.org/officeDocument/2006/math" xmlns:a14="http://schemas.microsoft.com/office/drawing/2010/main" xmlns:ma14="http://schemas.microsoft.com/office/mac/drawingml/2011/main" val="1"/>
+              <ma14:wrappingTextBoxFlag xmlns:ma14="http://schemas.microsoft.com/office/mac/drawingml/2011/main" xmlns:a14="http://schemas.microsoft.com/office/drawing/2010/main" xmlns:m="http://schemas.openxmlformats.org/officeDocument/2006/math" xmlns="" val="1"/>
             </a:ext>
           </a:extLst>
         </p:spPr>
@@ -9024,16 +9037,7 @@
                                   </a:solidFill>
                                   <a:latin typeface="Cambria Math" panose="02040503050406030204" pitchFamily="18" charset="0"/>
                                 </a:rPr>
-                                <m:t>=</m:t>
-                              </m:r>
-                              <m:r>
-                                <a:rPr sz="2320" i="1">
-                                  <a:solidFill>
-                                    <a:srgbClr val="000000"/>
-                                  </a:solidFill>
-                                  <a:latin typeface="Cambria Math" panose="02040503050406030204" pitchFamily="18" charset="0"/>
-                                </a:rPr>
-                                <m:t>1</m:t>
+                                <m:t>=1</m:t>
                               </m:r>
                             </m:lim>
                           </m:limLow>
@@ -9259,7 +9263,7 @@
           </a:ln>
           <a:extLst>
             <a:ext uri="{C572A759-6A51-4108-AA02-DFA0A04FC94B}">
-              <ma14:wrappingTextBoxFlag xmlns="" xmlns:m="http://schemas.openxmlformats.org/officeDocument/2006/math" xmlns:a14="http://schemas.microsoft.com/office/drawing/2010/main" xmlns:ma14="http://schemas.microsoft.com/office/mac/drawingml/2011/main" val="1"/>
+              <ma14:wrappingTextBoxFlag xmlns:ma14="http://schemas.microsoft.com/office/mac/drawingml/2011/main" xmlns:a14="http://schemas.microsoft.com/office/drawing/2010/main" xmlns:m="http://schemas.openxmlformats.org/officeDocument/2006/math" xmlns="" val="1"/>
             </a:ext>
           </a:extLst>
         </p:spPr>
@@ -9303,7 +9307,7 @@
           </a:ln>
           <a:extLst>
             <a:ext uri="{C572A759-6A51-4108-AA02-DFA0A04FC94B}">
-              <ma14:wrappingTextBoxFlag xmlns="" xmlns:m="http://schemas.openxmlformats.org/officeDocument/2006/math" xmlns:a14="http://schemas.microsoft.com/office/drawing/2010/main" xmlns:ma14="http://schemas.microsoft.com/office/mac/drawingml/2011/main" val="1"/>
+              <ma14:wrappingTextBoxFlag xmlns:ma14="http://schemas.microsoft.com/office/mac/drawingml/2011/main" xmlns:a14="http://schemas.microsoft.com/office/drawing/2010/main" xmlns:m="http://schemas.openxmlformats.org/officeDocument/2006/math" xmlns="" val="1"/>
             </a:ext>
           </a:extLst>
         </p:spPr>
@@ -9367,8 +9371,8 @@
         </p:nvSpPr>
         <p:spPr>
           <a:xfrm>
-            <a:off x="3945963" y="5227141"/>
-            <a:ext cx="3292876" cy="764633"/>
+            <a:off x="3945963" y="5111725"/>
+            <a:ext cx="3292876" cy="995465"/>
           </a:xfrm>
           <a:prstGeom prst="rect">
             <a:avLst/>
@@ -9378,7 +9382,7 @@
           </a:ln>
           <a:extLst>
             <a:ext uri="{C572A759-6A51-4108-AA02-DFA0A04FC94B}">
-              <ma14:wrappingTextBoxFlag xmlns="" xmlns:m="http://schemas.openxmlformats.org/officeDocument/2006/math" xmlns:a14="http://schemas.microsoft.com/office/drawing/2010/main" xmlns:ma14="http://schemas.microsoft.com/office/mac/drawingml/2011/main" val="1"/>
+              <ma14:wrappingTextBoxFlag xmlns:ma14="http://schemas.microsoft.com/office/mac/drawingml/2011/main" xmlns:a14="http://schemas.microsoft.com/office/drawing/2010/main" xmlns:m="http://schemas.openxmlformats.org/officeDocument/2006/math" xmlns="" val="1"/>
             </a:ext>
           </a:extLst>
         </p:spPr>
@@ -9414,7 +9418,15 @@
             </a:r>
             <a:r>
               <a:rPr sz="1500" dirty="0"/>
-              <a:t> are all independent</a:t>
+              <a:t> are all </a:t>
+            </a:r>
+            <a:r>
+              <a:rPr lang="en-US" sz="1500" dirty="0"/>
+              <a:t>conditionally </a:t>
+            </a:r>
+            <a:r>
+              <a:rPr sz="1500" dirty="0"/>
+              <a:t>independent</a:t>
             </a:r>
             <a:r>
               <a:rPr lang="en-US" sz="1500" dirty="0"/>
@@ -9769,7 +9781,7 @@
           </a:prstGeom>
           <a:extLst>
             <a:ext uri="{C572A759-6A51-4108-AA02-DFA0A04FC94B}">
-              <ma14:wrappingTextBoxFlag xmlns="" xmlns:m="http://schemas.openxmlformats.org/officeDocument/2006/math" xmlns:a14="http://schemas.microsoft.com/office/drawing/2010/main" xmlns:ma14="http://schemas.microsoft.com/office/mac/drawingml/2011/main" val="1"/>
+              <ma14:wrappingTextBoxFlag xmlns:ma14="http://schemas.microsoft.com/office/mac/drawingml/2011/main" xmlns:a14="http://schemas.microsoft.com/office/drawing/2010/main" xmlns:m="http://schemas.openxmlformats.org/officeDocument/2006/math" xmlns="" val="1"/>
             </a:ext>
           </a:extLst>
         </p:spPr>
@@ -10375,7 +10387,7 @@
           </a:ln>
           <a:extLst>
             <a:ext uri="{C572A759-6A51-4108-AA02-DFA0A04FC94B}">
-              <ma14:wrappingTextBoxFlag xmlns="" xmlns:m="http://schemas.openxmlformats.org/officeDocument/2006/math" xmlns:a14="http://schemas.microsoft.com/office/drawing/2010/main" xmlns:ma14="http://schemas.microsoft.com/office/mac/drawingml/2011/main" val="1"/>
+              <ma14:wrappingTextBoxFlag xmlns:ma14="http://schemas.microsoft.com/office/mac/drawingml/2011/main" xmlns:a14="http://schemas.microsoft.com/office/drawing/2010/main" xmlns:m="http://schemas.openxmlformats.org/officeDocument/2006/math" xmlns="" val="1"/>
             </a:ext>
           </a:extLst>
         </p:spPr>
@@ -11234,7 +11246,7 @@
               </a:ln>
               <a:extLst>
                 <a:ext uri="{C572A759-6A51-4108-AA02-DFA0A04FC94B}">
-                  <ma14:wrappingTextBoxFlag xmlns="" xmlns:m="http://schemas.openxmlformats.org/officeDocument/2006/math" xmlns:ma14="http://schemas.microsoft.com/office/mac/drawingml/2011/main" val="1"/>
+                  <ma14:wrappingTextBoxFlag xmlns:ma14="http://schemas.microsoft.com/office/mac/drawingml/2011/main" xmlns:m="http://schemas.openxmlformats.org/officeDocument/2006/math" xmlns="" val="1"/>
                 </a:ext>
               </a:extLst>
             </p:spPr>
@@ -11491,7 +11503,7 @@
               </a:ln>
               <a:extLst>
                 <a:ext uri="{C572A759-6A51-4108-AA02-DFA0A04FC94B}">
-                  <ma14:wrappingTextBoxFlag xmlns="" xmlns:m="http://schemas.openxmlformats.org/officeDocument/2006/math" xmlns:ma14="http://schemas.microsoft.com/office/mac/drawingml/2011/main" val="1"/>
+                  <ma14:wrappingTextBoxFlag xmlns:ma14="http://schemas.microsoft.com/office/mac/drawingml/2011/main" xmlns:m="http://schemas.openxmlformats.org/officeDocument/2006/math" xmlns="" val="1"/>
                 </a:ext>
               </a:extLst>
             </p:spPr>
@@ -11709,7 +11721,7 @@
           </a:prstGeom>
           <a:extLst>
             <a:ext uri="{C572A759-6A51-4108-AA02-DFA0A04FC94B}">
-              <ma14:wrappingTextBoxFlag xmlns="" xmlns:m="http://schemas.openxmlformats.org/officeDocument/2006/math" xmlns:a14="http://schemas.microsoft.com/office/drawing/2010/main" xmlns:ma14="http://schemas.microsoft.com/office/mac/drawingml/2011/main" val="1"/>
+              <ma14:wrappingTextBoxFlag xmlns:ma14="http://schemas.microsoft.com/office/mac/drawingml/2011/main" xmlns:a14="http://schemas.microsoft.com/office/drawing/2010/main" xmlns:m="http://schemas.openxmlformats.org/officeDocument/2006/math" xmlns="" val="1"/>
             </a:ext>
           </a:extLst>
         </p:spPr>
